--- a/B2B_Sales_Agent_Final.pptx
+++ b/B2B_Sales_Agent_Final.pptx
@@ -132,13 +132,60 @@
 <file path=ppt/revisionInfo.xml><?xml version="1.0" encoding="utf-8"?>
 <p1510:revInfo xmlns:a="http://schemas.openxmlformats.org/drawingml/2006/main" xmlns:r="http://schemas.openxmlformats.org/officeDocument/2006/relationships" xmlns:p1510="http://schemas.microsoft.com/office/powerpoint/2015/10/main">
   <p1510:revLst>
-    <p1510:client id="{8286BC8A-3CBC-4EB7-9027-9140479E27A4}" v="69" dt="2026-05-18T16:15:08.775"/>
+    <p1510:client id="{C005861E-97A5-4FCE-9613-933580FDF88D}" v="10" dt="2026-05-23T22:58:12.179"/>
   </p1510:revLst>
 </p1510:revInfo>
 </file>
 
 <file path=ppt/changesInfos/changesInfo1.xml><?xml version="1.0" encoding="utf-8"?>
 <pc:chgInfo xmlns:a="http://schemas.openxmlformats.org/drawingml/2006/main" xmlns:r="http://schemas.openxmlformats.org/officeDocument/2006/relationships" xmlns:ac="http://schemas.microsoft.com/office/drawing/2013/main/command" xmlns:pc="http://schemas.microsoft.com/office/powerpoint/2013/main/command">
+  <pc:docChgLst>
+    <pc:chgData name="Mohan, Arun" userId="3cf97d7c-9072-4788-8fc7-36a73324abe6" providerId="ADAL" clId="{52652E29-AB0D-4F64-B689-2D843D2D16B6}"/>
+    <pc:docChg chg="undo custSel modSld">
+      <pc:chgData name="Mohan, Arun" userId="3cf97d7c-9072-4788-8fc7-36a73324abe6" providerId="ADAL" clId="{52652E29-AB0D-4F64-B689-2D843D2D16B6}" dt="2026-05-23T22:58:12.177" v="11" actId="478"/>
+      <pc:docMkLst>
+        <pc:docMk/>
+      </pc:docMkLst>
+      <pc:sldChg chg="addSp delSp modSp mod">
+        <pc:chgData name="Mohan, Arun" userId="3cf97d7c-9072-4788-8fc7-36a73324abe6" providerId="ADAL" clId="{52652E29-AB0D-4F64-B689-2D843D2D16B6}" dt="2026-05-23T22:57:35.562" v="7" actId="14100"/>
+        <pc:sldMkLst>
+          <pc:docMk/>
+          <pc:sldMk cId="0" sldId="256"/>
+        </pc:sldMkLst>
+        <pc:spChg chg="add del">
+          <ac:chgData name="Mohan, Arun" userId="3cf97d7c-9072-4788-8fc7-36a73324abe6" providerId="ADAL" clId="{52652E29-AB0D-4F64-B689-2D843D2D16B6}" dt="2026-05-23T22:53:59.215" v="1" actId="22"/>
+          <ac:spMkLst>
+            <pc:docMk/>
+            <pc:sldMk cId="0" sldId="256"/>
+            <ac:spMk id="22" creationId="{C6A83B43-83A5-3F0E-64A6-D9B3D44B2A04}"/>
+          </ac:spMkLst>
+        </pc:spChg>
+        <pc:picChg chg="add mod">
+          <ac:chgData name="Mohan, Arun" userId="3cf97d7c-9072-4788-8fc7-36a73324abe6" providerId="ADAL" clId="{52652E29-AB0D-4F64-B689-2D843D2D16B6}" dt="2026-05-23T22:57:35.562" v="7" actId="14100"/>
+          <ac:picMkLst>
+            <pc:docMk/>
+            <pc:sldMk cId="0" sldId="256"/>
+            <ac:picMk id="1026" creationId="{F1BE82D6-F6AC-1DFF-EC36-23EE5C75B2E7}"/>
+          </ac:picMkLst>
+        </pc:picChg>
+      </pc:sldChg>
+      <pc:sldChg chg="addSp delSp modSp">
+        <pc:chgData name="Mohan, Arun" userId="3cf97d7c-9072-4788-8fc7-36a73324abe6" providerId="ADAL" clId="{52652E29-AB0D-4F64-B689-2D843D2D16B6}" dt="2026-05-23T22:58:12.177" v="11" actId="478"/>
+        <pc:sldMkLst>
+          <pc:docMk/>
+          <pc:sldMk cId="0" sldId="257"/>
+        </pc:sldMkLst>
+        <pc:picChg chg="add del mod">
+          <ac:chgData name="Mohan, Arun" userId="3cf97d7c-9072-4788-8fc7-36a73324abe6" providerId="ADAL" clId="{52652E29-AB0D-4F64-B689-2D843D2D16B6}" dt="2026-05-23T22:58:12.177" v="11" actId="478"/>
+          <ac:picMkLst>
+            <pc:docMk/>
+            <pc:sldMk cId="0" sldId="257"/>
+            <ac:picMk id="35" creationId="{8E849CFE-B048-801F-DCE7-2C5A4E87FEE8}"/>
+          </ac:picMkLst>
+        </pc:picChg>
+      </pc:sldChg>
+    </pc:docChg>
+  </pc:docChgLst>
   <pc:docChgLst>
     <pc:chgData name="Clever, Aubin" userId="13ca3d7b-db6b-4256-944a-b4e7cf688f90" providerId="ADAL" clId="{EB37EC22-7094-40D1-995C-570CBAC1C1EB}"/>
     <pc:docChg chg="undo custSel addSld delSld modSld sldOrd">
@@ -161,14 +208,6 @@
           </ac:spMkLst>
         </pc:spChg>
         <pc:spChg chg="add mod">
-          <ac:chgData name="Clever, Aubin" userId="13ca3d7b-db6b-4256-944a-b4e7cf688f90" providerId="ADAL" clId="{EB37EC22-7094-40D1-995C-570CBAC1C1EB}" dt="2026-05-18T12:58:41.991" v="2" actId="1076"/>
-          <ac:spMkLst>
-            <pc:docMk/>
-            <pc:sldMk cId="0" sldId="256"/>
-            <ac:spMk id="22" creationId="{1D61976E-13F6-2C7C-3930-C1FC25C137A6}"/>
-          </ac:spMkLst>
-        </pc:spChg>
-        <pc:spChg chg="add mod">
           <ac:chgData name="Clever, Aubin" userId="13ca3d7b-db6b-4256-944a-b4e7cf688f90" providerId="ADAL" clId="{EB37EC22-7094-40D1-995C-570CBAC1C1EB}" dt="2026-05-18T12:58:59.256" v="4" actId="1076"/>
           <ac:spMkLst>
             <pc:docMk/>
@@ -176,14 +215,6 @@
             <ac:spMk id="24" creationId="{6E3DE909-E912-ED5C-817B-8C1C378E4D22}"/>
           </ac:spMkLst>
         </pc:spChg>
-        <pc:picChg chg="add mod">
-          <ac:chgData name="Clever, Aubin" userId="13ca3d7b-db6b-4256-944a-b4e7cf688f90" providerId="ADAL" clId="{EB37EC22-7094-40D1-995C-570CBAC1C1EB}" dt="2026-05-18T12:58:41.991" v="2" actId="1076"/>
-          <ac:picMkLst>
-            <pc:docMk/>
-            <pc:sldMk cId="0" sldId="256"/>
-            <ac:picMk id="21" creationId="{9606B88A-B666-317E-CDE7-210ABE8A986D}"/>
-          </ac:picMkLst>
-        </pc:picChg>
         <pc:picChg chg="add mod">
           <ac:chgData name="Clever, Aubin" userId="13ca3d7b-db6b-4256-944a-b4e7cf688f90" providerId="ADAL" clId="{EB37EC22-7094-40D1-995C-570CBAC1C1EB}" dt="2026-05-18T12:58:59.256" v="4" actId="1076"/>
           <ac:picMkLst>
@@ -230,22 +261,6 @@
             <ac:spMk id="3" creationId="{00000000-0000-0000-0000-000000000000}"/>
           </ac:spMkLst>
         </pc:spChg>
-        <pc:spChg chg="del mod">
-          <ac:chgData name="Clever, Aubin" userId="13ca3d7b-db6b-4256-944a-b4e7cf688f90" providerId="ADAL" clId="{EB37EC22-7094-40D1-995C-570CBAC1C1EB}" dt="2026-05-18T15:02:17.917" v="801" actId="478"/>
-          <ac:spMkLst>
-            <pc:docMk/>
-            <pc:sldMk cId="0" sldId="262"/>
-            <ac:spMk id="5" creationId="{00000000-0000-0000-0000-000000000000}"/>
-          </ac:spMkLst>
-        </pc:spChg>
-        <pc:spChg chg="del">
-          <ac:chgData name="Clever, Aubin" userId="13ca3d7b-db6b-4256-944a-b4e7cf688f90" providerId="ADAL" clId="{EB37EC22-7094-40D1-995C-570CBAC1C1EB}" dt="2026-05-18T14:59:54.198" v="762" actId="478"/>
-          <ac:spMkLst>
-            <pc:docMk/>
-            <pc:sldMk cId="0" sldId="262"/>
-            <ac:spMk id="6" creationId="{00000000-0000-0000-0000-000000000000}"/>
-          </ac:spMkLst>
-        </pc:spChg>
         <pc:spChg chg="mod">
           <ac:chgData name="Clever, Aubin" userId="13ca3d7b-db6b-4256-944a-b4e7cf688f90" providerId="ADAL" clId="{EB37EC22-7094-40D1-995C-570CBAC1C1EB}" dt="2026-05-18T14:59:55.685" v="763" actId="6549"/>
           <ac:spMkLst>
@@ -254,110 +269,6 @@
             <ac:spMk id="7" creationId="{00000000-0000-0000-0000-000000000000}"/>
           </ac:spMkLst>
         </pc:spChg>
-        <pc:spChg chg="del">
-          <ac:chgData name="Clever, Aubin" userId="13ca3d7b-db6b-4256-944a-b4e7cf688f90" providerId="ADAL" clId="{EB37EC22-7094-40D1-995C-570CBAC1C1EB}" dt="2026-05-18T14:59:58.527" v="765" actId="478"/>
-          <ac:spMkLst>
-            <pc:docMk/>
-            <pc:sldMk cId="0" sldId="262"/>
-            <ac:spMk id="8" creationId="{00000000-0000-0000-0000-000000000000}"/>
-          </ac:spMkLst>
-        </pc:spChg>
-        <pc:spChg chg="del">
-          <ac:chgData name="Clever, Aubin" userId="13ca3d7b-db6b-4256-944a-b4e7cf688f90" providerId="ADAL" clId="{EB37EC22-7094-40D1-995C-570CBAC1C1EB}" dt="2026-05-18T14:59:57.623" v="764" actId="478"/>
-          <ac:spMkLst>
-            <pc:docMk/>
-            <pc:sldMk cId="0" sldId="262"/>
-            <ac:spMk id="9" creationId="{00000000-0000-0000-0000-000000000000}"/>
-          </ac:spMkLst>
-        </pc:spChg>
-        <pc:spChg chg="del">
-          <ac:chgData name="Clever, Aubin" userId="13ca3d7b-db6b-4256-944a-b4e7cf688f90" providerId="ADAL" clId="{EB37EC22-7094-40D1-995C-570CBAC1C1EB}" dt="2026-05-18T15:00:01.879" v="768" actId="478"/>
-          <ac:spMkLst>
-            <pc:docMk/>
-            <pc:sldMk cId="0" sldId="262"/>
-            <ac:spMk id="10" creationId="{00000000-0000-0000-0000-000000000000}"/>
-          </ac:spMkLst>
-        </pc:spChg>
-        <pc:spChg chg="del mod">
-          <ac:chgData name="Clever, Aubin" userId="13ca3d7b-db6b-4256-944a-b4e7cf688f90" providerId="ADAL" clId="{EB37EC22-7094-40D1-995C-570CBAC1C1EB}" dt="2026-05-18T15:00:01.190" v="767" actId="478"/>
-          <ac:spMkLst>
-            <pc:docMk/>
-            <pc:sldMk cId="0" sldId="262"/>
-            <ac:spMk id="11" creationId="{00000000-0000-0000-0000-000000000000}"/>
-          </ac:spMkLst>
-        </pc:spChg>
-        <pc:spChg chg="del">
-          <ac:chgData name="Clever, Aubin" userId="13ca3d7b-db6b-4256-944a-b4e7cf688f90" providerId="ADAL" clId="{EB37EC22-7094-40D1-995C-570CBAC1C1EB}" dt="2026-05-18T15:00:03.071" v="769" actId="478"/>
-          <ac:spMkLst>
-            <pc:docMk/>
-            <pc:sldMk cId="0" sldId="262"/>
-            <ac:spMk id="12" creationId="{00000000-0000-0000-0000-000000000000}"/>
-          </ac:spMkLst>
-        </pc:spChg>
-        <pc:spChg chg="del">
-          <ac:chgData name="Clever, Aubin" userId="13ca3d7b-db6b-4256-944a-b4e7cf688f90" providerId="ADAL" clId="{EB37EC22-7094-40D1-995C-570CBAC1C1EB}" dt="2026-05-18T15:00:05.167" v="770" actId="478"/>
-          <ac:spMkLst>
-            <pc:docMk/>
-            <pc:sldMk cId="0" sldId="262"/>
-            <ac:spMk id="13" creationId="{00000000-0000-0000-0000-000000000000}"/>
-          </ac:spMkLst>
-        </pc:spChg>
-        <pc:spChg chg="del">
-          <ac:chgData name="Clever, Aubin" userId="13ca3d7b-db6b-4256-944a-b4e7cf688f90" providerId="ADAL" clId="{EB37EC22-7094-40D1-995C-570CBAC1C1EB}" dt="2026-05-18T15:00:09.280" v="773" actId="478"/>
-          <ac:spMkLst>
-            <pc:docMk/>
-            <pc:sldMk cId="0" sldId="262"/>
-            <ac:spMk id="14" creationId="{00000000-0000-0000-0000-000000000000}"/>
-          </ac:spMkLst>
-        </pc:spChg>
-        <pc:spChg chg="del">
-          <ac:chgData name="Clever, Aubin" userId="13ca3d7b-db6b-4256-944a-b4e7cf688f90" providerId="ADAL" clId="{EB37EC22-7094-40D1-995C-570CBAC1C1EB}" dt="2026-05-18T15:00:11.481" v="774" actId="478"/>
-          <ac:spMkLst>
-            <pc:docMk/>
-            <pc:sldMk cId="0" sldId="262"/>
-            <ac:spMk id="15" creationId="{00000000-0000-0000-0000-000000000000}"/>
-          </ac:spMkLst>
-        </pc:spChg>
-        <pc:spChg chg="del">
-          <ac:chgData name="Clever, Aubin" userId="13ca3d7b-db6b-4256-944a-b4e7cf688f90" providerId="ADAL" clId="{EB37EC22-7094-40D1-995C-570CBAC1C1EB}" dt="2026-05-18T15:00:13.814" v="775" actId="478"/>
-          <ac:spMkLst>
-            <pc:docMk/>
-            <pc:sldMk cId="0" sldId="262"/>
-            <ac:spMk id="16" creationId="{00000000-0000-0000-0000-000000000000}"/>
-          </ac:spMkLst>
-        </pc:spChg>
-        <pc:spChg chg="del">
-          <ac:chgData name="Clever, Aubin" userId="13ca3d7b-db6b-4256-944a-b4e7cf688f90" providerId="ADAL" clId="{EB37EC22-7094-40D1-995C-570CBAC1C1EB}" dt="2026-05-18T15:00:08.042" v="772" actId="478"/>
-          <ac:spMkLst>
-            <pc:docMk/>
-            <pc:sldMk cId="0" sldId="262"/>
-            <ac:spMk id="18" creationId="{4DF64D9A-4616-9DF9-085C-1E4AB4E28D1F}"/>
-          </ac:spMkLst>
-        </pc:spChg>
-        <pc:spChg chg="del">
-          <ac:chgData name="Clever, Aubin" userId="13ca3d7b-db6b-4256-944a-b4e7cf688f90" providerId="ADAL" clId="{EB37EC22-7094-40D1-995C-570CBAC1C1EB}" dt="2026-05-18T15:00:07.377" v="771" actId="478"/>
-          <ac:spMkLst>
-            <pc:docMk/>
-            <pc:sldMk cId="0" sldId="262"/>
-            <ac:spMk id="19" creationId="{6197154D-2F2F-0444-9AAB-FE2683DED50B}"/>
-          </ac:spMkLst>
-        </pc:spChg>
-        <pc:picChg chg="add del mod">
-          <ac:chgData name="Clever, Aubin" userId="13ca3d7b-db6b-4256-944a-b4e7cf688f90" providerId="ADAL" clId="{EB37EC22-7094-40D1-995C-570CBAC1C1EB}" dt="2026-05-18T15:04:22.727" v="805" actId="478"/>
-          <ac:picMkLst>
-            <pc:docMk/>
-            <pc:sldMk cId="0" sldId="262"/>
-            <ac:picMk id="17" creationId="{9C54B349-BEAC-71C5-1DA1-D0F13AFB0A6B}"/>
-          </ac:picMkLst>
-        </pc:picChg>
-        <pc:picChg chg="add del mod">
-          <ac:chgData name="Clever, Aubin" userId="13ca3d7b-db6b-4256-944a-b4e7cf688f90" providerId="ADAL" clId="{EB37EC22-7094-40D1-995C-570CBAC1C1EB}" dt="2026-05-18T15:28:31.528" v="841" actId="478"/>
-          <ac:picMkLst>
-            <pc:docMk/>
-            <pc:sldMk cId="0" sldId="262"/>
-            <ac:picMk id="21" creationId="{08FAB796-A675-CB0F-71B0-42783035AB32}"/>
-          </ac:picMkLst>
-        </pc:picChg>
         <pc:picChg chg="add mod">
           <ac:chgData name="Clever, Aubin" userId="13ca3d7b-db6b-4256-944a-b4e7cf688f90" providerId="ADAL" clId="{EB37EC22-7094-40D1-995C-570CBAC1C1EB}" dt="2026-05-18T15:28:45.075" v="852" actId="1076"/>
           <ac:picMkLst>
@@ -366,13 +277,6 @@
             <ac:picMk id="23" creationId="{9C1C86CD-2ECA-DAE5-E4FA-8AA271FF23F2}"/>
           </ac:picMkLst>
         </pc:picChg>
-      </pc:sldChg>
-      <pc:sldChg chg="del">
-        <pc:chgData name="Clever, Aubin" userId="13ca3d7b-db6b-4256-944a-b4e7cf688f90" providerId="ADAL" clId="{EB37EC22-7094-40D1-995C-570CBAC1C1EB}" dt="2026-05-18T14:55:15.781" v="721" actId="2696"/>
-        <pc:sldMkLst>
-          <pc:docMk/>
-          <pc:sldMk cId="0" sldId="263"/>
-        </pc:sldMkLst>
       </pc:sldChg>
       <pc:sldChg chg="modSp mod setBg">
         <pc:chgData name="Clever, Aubin" userId="13ca3d7b-db6b-4256-944a-b4e7cf688f90" providerId="ADAL" clId="{EB37EC22-7094-40D1-995C-570CBAC1C1EB}" dt="2026-05-18T13:06:34.383" v="130"/>
@@ -388,13 +292,6 @@
             <ac:spMk id="5" creationId="{00000000-0000-0000-0000-000000000000}"/>
           </ac:spMkLst>
         </pc:spChg>
-      </pc:sldChg>
-      <pc:sldChg chg="del">
-        <pc:chgData name="Clever, Aubin" userId="13ca3d7b-db6b-4256-944a-b4e7cf688f90" providerId="ADAL" clId="{EB37EC22-7094-40D1-995C-570CBAC1C1EB}" dt="2026-05-18T13:30:22.849" v="227" actId="2696"/>
-        <pc:sldMkLst>
-          <pc:docMk/>
-          <pc:sldMk cId="0" sldId="267"/>
-        </pc:sldMkLst>
       </pc:sldChg>
       <pc:sldChg chg="modSp add mod setBg">
         <pc:chgData name="Clever, Aubin" userId="13ca3d7b-db6b-4256-944a-b4e7cf688f90" providerId="ADAL" clId="{EB37EC22-7094-40D1-995C-570CBAC1C1EB}" dt="2026-05-18T13:43:24.963" v="384" actId="1076"/>
@@ -465,22 +362,6 @@
             <ac:spMk id="3" creationId="{00000000-0000-0000-0000-000000000000}"/>
           </ac:spMkLst>
         </pc:spChg>
-        <pc:spChg chg="del">
-          <ac:chgData name="Clever, Aubin" userId="13ca3d7b-db6b-4256-944a-b4e7cf688f90" providerId="ADAL" clId="{EB37EC22-7094-40D1-995C-570CBAC1C1EB}" dt="2026-05-18T13:01:44.281" v="71" actId="478"/>
-          <ac:spMkLst>
-            <pc:docMk/>
-            <pc:sldMk cId="0" sldId="277"/>
-            <ac:spMk id="5" creationId="{00000000-0000-0000-0000-000000000000}"/>
-          </ac:spMkLst>
-        </pc:spChg>
-        <pc:spChg chg="add del mod">
-          <ac:chgData name="Clever, Aubin" userId="13ca3d7b-db6b-4256-944a-b4e7cf688f90" providerId="ADAL" clId="{EB37EC22-7094-40D1-995C-570CBAC1C1EB}" dt="2026-05-18T13:01:31.569" v="17" actId="478"/>
-          <ac:spMkLst>
-            <pc:docMk/>
-            <pc:sldMk cId="0" sldId="277"/>
-            <ac:spMk id="31" creationId="{C96E46D2-8856-5B5A-BABA-1322DBECB94A}"/>
-          </ac:spMkLst>
-        </pc:spChg>
       </pc:sldChg>
       <pc:sldChg chg="addSp delSp modSp add del mod setBg">
         <pc:chgData name="Clever, Aubin" userId="13ca3d7b-db6b-4256-944a-b4e7cf688f90" providerId="ADAL" clId="{EB37EC22-7094-40D1-995C-570CBAC1C1EB}" dt="2026-05-18T16:13:55.895" v="940" actId="478"/>
@@ -536,68 +417,12 @@
             <ac:spMk id="35" creationId="{00000000-0000-0000-0000-000000000000}"/>
           </ac:spMkLst>
         </pc:spChg>
-        <pc:spChg chg="del">
-          <ac:chgData name="Clever, Aubin" userId="13ca3d7b-db6b-4256-944a-b4e7cf688f90" providerId="ADAL" clId="{EB37EC22-7094-40D1-995C-570CBAC1C1EB}" dt="2026-05-18T16:13:53.879" v="938" actId="478"/>
-          <ac:spMkLst>
-            <pc:docMk/>
-            <pc:sldMk cId="0" sldId="278"/>
-            <ac:spMk id="41" creationId="{00000000-0000-0000-0000-000000000000}"/>
-          </ac:spMkLst>
-        </pc:spChg>
-        <pc:spChg chg="del">
-          <ac:chgData name="Clever, Aubin" userId="13ca3d7b-db6b-4256-944a-b4e7cf688f90" providerId="ADAL" clId="{EB37EC22-7094-40D1-995C-570CBAC1C1EB}" dt="2026-05-18T16:13:55.895" v="940" actId="478"/>
-          <ac:spMkLst>
-            <pc:docMk/>
-            <pc:sldMk cId="0" sldId="278"/>
-            <ac:spMk id="43" creationId="{00000000-0000-0000-0000-000000000000}"/>
-          </ac:spMkLst>
-        </pc:spChg>
         <pc:spChg chg="mod">
           <ac:chgData name="Clever, Aubin" userId="13ca3d7b-db6b-4256-944a-b4e7cf688f90" providerId="ADAL" clId="{EB37EC22-7094-40D1-995C-570CBAC1C1EB}" dt="2026-05-18T16:07:46.165" v="878" actId="1076"/>
           <ac:spMkLst>
             <pc:docMk/>
             <pc:sldMk cId="0" sldId="278"/>
             <ac:spMk id="50" creationId="{00000000-0000-0000-0000-000000000000}"/>
-          </ac:spMkLst>
-        </pc:spChg>
-        <pc:spChg chg="del mod">
-          <ac:chgData name="Clever, Aubin" userId="13ca3d7b-db6b-4256-944a-b4e7cf688f90" providerId="ADAL" clId="{EB37EC22-7094-40D1-995C-570CBAC1C1EB}" dt="2026-05-18T16:11:47.172" v="930" actId="478"/>
-          <ac:spMkLst>
-            <pc:docMk/>
-            <pc:sldMk cId="0" sldId="278"/>
-            <ac:spMk id="54" creationId="{00000000-0000-0000-0000-000000000000}"/>
-          </ac:spMkLst>
-        </pc:spChg>
-        <pc:spChg chg="del mod">
-          <ac:chgData name="Clever, Aubin" userId="13ca3d7b-db6b-4256-944a-b4e7cf688f90" providerId="ADAL" clId="{EB37EC22-7094-40D1-995C-570CBAC1C1EB}" dt="2026-05-18T16:11:50.718" v="933" actId="478"/>
-          <ac:spMkLst>
-            <pc:docMk/>
-            <pc:sldMk cId="0" sldId="278"/>
-            <ac:spMk id="56" creationId="{00000000-0000-0000-0000-000000000000}"/>
-          </ac:spMkLst>
-        </pc:spChg>
-        <pc:spChg chg="del">
-          <ac:chgData name="Clever, Aubin" userId="13ca3d7b-db6b-4256-944a-b4e7cf688f90" providerId="ADAL" clId="{EB37EC22-7094-40D1-995C-570CBAC1C1EB}" dt="2026-05-18T16:13:31.109" v="935" actId="478"/>
-          <ac:spMkLst>
-            <pc:docMk/>
-            <pc:sldMk cId="0" sldId="278"/>
-            <ac:spMk id="62" creationId="{00000000-0000-0000-0000-000000000000}"/>
-          </ac:spMkLst>
-        </pc:spChg>
-        <pc:spChg chg="del">
-          <ac:chgData name="Clever, Aubin" userId="13ca3d7b-db6b-4256-944a-b4e7cf688f90" providerId="ADAL" clId="{EB37EC22-7094-40D1-995C-570CBAC1C1EB}" dt="2026-05-18T16:13:33.262" v="937" actId="478"/>
-          <ac:spMkLst>
-            <pc:docMk/>
-            <pc:sldMk cId="0" sldId="278"/>
-            <ac:spMk id="64" creationId="{00000000-0000-0000-0000-000000000000}"/>
-          </ac:spMkLst>
-        </pc:spChg>
-        <pc:spChg chg="add del mod">
-          <ac:chgData name="Clever, Aubin" userId="13ca3d7b-db6b-4256-944a-b4e7cf688f90" providerId="ADAL" clId="{EB37EC22-7094-40D1-995C-570CBAC1C1EB}" dt="2026-05-18T13:10:50.580" v="138" actId="21"/>
-          <ac:spMkLst>
-            <pc:docMk/>
-            <pc:sldMk cId="0" sldId="278"/>
-            <ac:spMk id="80" creationId="{1A5A36A2-7E16-B6BC-C475-CAB7440E8206}"/>
           </ac:spMkLst>
         </pc:spChg>
         <pc:spChg chg="add mod">
@@ -608,188 +433,12 @@
             <ac:spMk id="81" creationId="{D9504386-B96F-3C8F-E736-8805F7BEAA15}"/>
           </ac:spMkLst>
         </pc:spChg>
-        <pc:spChg chg="add mod">
-          <ac:chgData name="Clever, Aubin" userId="13ca3d7b-db6b-4256-944a-b4e7cf688f90" providerId="ADAL" clId="{EB37EC22-7094-40D1-995C-570CBAC1C1EB}" dt="2026-05-18T13:13:22.040" v="163"/>
-          <ac:spMkLst>
-            <pc:docMk/>
-            <pc:sldMk cId="0" sldId="278"/>
-            <ac:spMk id="82" creationId="{53F92DDB-09C7-B3C6-E47B-E302F42170F2}"/>
-          </ac:spMkLst>
-        </pc:spChg>
-        <pc:spChg chg="add mod ord">
-          <ac:chgData name="Clever, Aubin" userId="13ca3d7b-db6b-4256-944a-b4e7cf688f90" providerId="ADAL" clId="{EB37EC22-7094-40D1-995C-570CBAC1C1EB}" dt="2026-05-18T13:15:27.396" v="185" actId="1076"/>
-          <ac:spMkLst>
-            <pc:docMk/>
-            <pc:sldMk cId="0" sldId="278"/>
-            <ac:spMk id="84" creationId="{6A99D812-8A02-6B5B-F8D3-8ED7E21750CD}"/>
-          </ac:spMkLst>
-        </pc:spChg>
-        <pc:spChg chg="add mod">
-          <ac:chgData name="Clever, Aubin" userId="13ca3d7b-db6b-4256-944a-b4e7cf688f90" providerId="ADAL" clId="{EB37EC22-7094-40D1-995C-570CBAC1C1EB}" dt="2026-05-18T13:18:24.848" v="213" actId="14100"/>
-          <ac:spMkLst>
-            <pc:docMk/>
-            <pc:sldMk cId="0" sldId="278"/>
-            <ac:spMk id="87" creationId="{712F7A71-F7A2-5C53-D904-8F7C2BCF78F3}"/>
-          </ac:spMkLst>
-        </pc:spChg>
-        <pc:spChg chg="add mod">
-          <ac:chgData name="Clever, Aubin" userId="13ca3d7b-db6b-4256-944a-b4e7cf688f90" providerId="ADAL" clId="{EB37EC22-7094-40D1-995C-570CBAC1C1EB}" dt="2026-05-18T13:18:24.848" v="213" actId="14100"/>
-          <ac:spMkLst>
-            <pc:docMk/>
-            <pc:sldMk cId="0" sldId="278"/>
-            <ac:spMk id="88" creationId="{AED93999-B891-19CF-FB47-F7BE901711DF}"/>
-          </ac:spMkLst>
-        </pc:spChg>
-        <pc:spChg chg="add mod">
-          <ac:chgData name="Clever, Aubin" userId="13ca3d7b-db6b-4256-944a-b4e7cf688f90" providerId="ADAL" clId="{EB37EC22-7094-40D1-995C-570CBAC1C1EB}" dt="2026-05-18T13:18:24.848" v="213" actId="14100"/>
-          <ac:spMkLst>
-            <pc:docMk/>
-            <pc:sldMk cId="0" sldId="278"/>
-            <ac:spMk id="89" creationId="{2B8A618B-B085-6D03-C963-9364CFC27B1C}"/>
-          </ac:spMkLst>
-        </pc:spChg>
-        <pc:spChg chg="add mod">
-          <ac:chgData name="Clever, Aubin" userId="13ca3d7b-db6b-4256-944a-b4e7cf688f90" providerId="ADAL" clId="{EB37EC22-7094-40D1-995C-570CBAC1C1EB}" dt="2026-05-18T13:18:24.848" v="213" actId="14100"/>
-          <ac:spMkLst>
-            <pc:docMk/>
-            <pc:sldMk cId="0" sldId="278"/>
-            <ac:spMk id="91" creationId="{316B983E-AE11-22FD-43A6-EA36BEC418EB}"/>
-          </ac:spMkLst>
-        </pc:spChg>
-        <pc:spChg chg="add mod">
-          <ac:chgData name="Clever, Aubin" userId="13ca3d7b-db6b-4256-944a-b4e7cf688f90" providerId="ADAL" clId="{EB37EC22-7094-40D1-995C-570CBAC1C1EB}" dt="2026-05-18T13:18:24.848" v="213" actId="14100"/>
-          <ac:spMkLst>
-            <pc:docMk/>
-            <pc:sldMk cId="0" sldId="278"/>
-            <ac:spMk id="92" creationId="{82A75B4A-8AA6-0F6A-FA27-83E7E6BD69D3}"/>
-          </ac:spMkLst>
-        </pc:spChg>
-        <pc:spChg chg="add mod">
-          <ac:chgData name="Clever, Aubin" userId="13ca3d7b-db6b-4256-944a-b4e7cf688f90" providerId="ADAL" clId="{EB37EC22-7094-40D1-995C-570CBAC1C1EB}" dt="2026-05-18T13:18:24.848" v="213" actId="14100"/>
-          <ac:spMkLst>
-            <pc:docMk/>
-            <pc:sldMk cId="0" sldId="278"/>
-            <ac:spMk id="94" creationId="{5C5C91BC-BE1F-320D-A257-0739912EA76B}"/>
-          </ac:spMkLst>
-        </pc:spChg>
-        <pc:spChg chg="add mod">
-          <ac:chgData name="Clever, Aubin" userId="13ca3d7b-db6b-4256-944a-b4e7cf688f90" providerId="ADAL" clId="{EB37EC22-7094-40D1-995C-570CBAC1C1EB}" dt="2026-05-18T13:18:24.848" v="213" actId="14100"/>
-          <ac:spMkLst>
-            <pc:docMk/>
-            <pc:sldMk cId="0" sldId="278"/>
-            <ac:spMk id="96" creationId="{7AEB2B99-9B7A-A1F4-5E56-D73E178D4A6E}"/>
-          </ac:spMkLst>
-        </pc:spChg>
-        <pc:spChg chg="add mod">
-          <ac:chgData name="Clever, Aubin" userId="13ca3d7b-db6b-4256-944a-b4e7cf688f90" providerId="ADAL" clId="{EB37EC22-7094-40D1-995C-570CBAC1C1EB}" dt="2026-05-18T13:18:24.848" v="213" actId="14100"/>
-          <ac:spMkLst>
-            <pc:docMk/>
-            <pc:sldMk cId="0" sldId="278"/>
-            <ac:spMk id="97" creationId="{026B590D-0277-6174-C64D-F8F6AB918C96}"/>
-          </ac:spMkLst>
-        </pc:spChg>
-        <pc:spChg chg="add mod">
-          <ac:chgData name="Clever, Aubin" userId="13ca3d7b-db6b-4256-944a-b4e7cf688f90" providerId="ADAL" clId="{EB37EC22-7094-40D1-995C-570CBAC1C1EB}" dt="2026-05-18T13:18:24.848" v="213" actId="14100"/>
-          <ac:spMkLst>
-            <pc:docMk/>
-            <pc:sldMk cId="0" sldId="278"/>
-            <ac:spMk id="98" creationId="{8E413AD4-F010-9AC5-D84B-1C848419BFAB}"/>
-          </ac:spMkLst>
-        </pc:spChg>
-        <pc:spChg chg="add mod">
-          <ac:chgData name="Clever, Aubin" userId="13ca3d7b-db6b-4256-944a-b4e7cf688f90" providerId="ADAL" clId="{EB37EC22-7094-40D1-995C-570CBAC1C1EB}" dt="2026-05-18T13:18:24.848" v="213" actId="14100"/>
-          <ac:spMkLst>
-            <pc:docMk/>
-            <pc:sldMk cId="0" sldId="278"/>
-            <ac:spMk id="99" creationId="{9FAC909B-5BDF-FED9-97AD-BA329D779A25}"/>
-          </ac:spMkLst>
-        </pc:spChg>
-        <pc:picChg chg="add del">
-          <ac:chgData name="Clever, Aubin" userId="13ca3d7b-db6b-4256-944a-b4e7cf688f90" providerId="ADAL" clId="{EB37EC22-7094-40D1-995C-570CBAC1C1EB}" dt="2026-05-18T13:16:56.561" v="200" actId="478"/>
-          <ac:picMkLst>
-            <pc:docMk/>
-            <pc:sldMk cId="0" sldId="278"/>
-            <ac:picMk id="9" creationId="{00000000-0000-0000-0000-000000000000}"/>
-          </ac:picMkLst>
-        </pc:picChg>
-        <pc:picChg chg="del">
-          <ac:chgData name="Clever, Aubin" userId="13ca3d7b-db6b-4256-944a-b4e7cf688f90" providerId="ADAL" clId="{EB37EC22-7094-40D1-995C-570CBAC1C1EB}" dt="2026-05-18T16:10:21.084" v="918" actId="478"/>
-          <ac:picMkLst>
-            <pc:docMk/>
-            <pc:sldMk cId="0" sldId="278"/>
-            <ac:picMk id="26" creationId="{00000000-0000-0000-0000-000000000000}"/>
-          </ac:picMkLst>
-        </pc:picChg>
-        <pc:picChg chg="del">
-          <ac:chgData name="Clever, Aubin" userId="13ca3d7b-db6b-4256-944a-b4e7cf688f90" providerId="ADAL" clId="{EB37EC22-7094-40D1-995C-570CBAC1C1EB}" dt="2026-05-18T16:13:54.534" v="939" actId="478"/>
-          <ac:picMkLst>
-            <pc:docMk/>
-            <pc:sldMk cId="0" sldId="278"/>
-            <ac:picMk id="42" creationId="{00000000-0000-0000-0000-000000000000}"/>
-          </ac:picMkLst>
-        </pc:picChg>
-        <pc:picChg chg="del">
-          <ac:chgData name="Clever, Aubin" userId="13ca3d7b-db6b-4256-944a-b4e7cf688f90" providerId="ADAL" clId="{EB37EC22-7094-40D1-995C-570CBAC1C1EB}" dt="2026-05-18T16:11:49.021" v="932" actId="478"/>
-          <ac:picMkLst>
-            <pc:docMk/>
-            <pc:sldMk cId="0" sldId="278"/>
-            <ac:picMk id="55" creationId="{00000000-0000-0000-0000-000000000000}"/>
-          </ac:picMkLst>
-        </pc:picChg>
-        <pc:picChg chg="del">
-          <ac:chgData name="Clever, Aubin" userId="13ca3d7b-db6b-4256-944a-b4e7cf688f90" providerId="ADAL" clId="{EB37EC22-7094-40D1-995C-570CBAC1C1EB}" dt="2026-05-18T16:13:31.722" v="936" actId="478"/>
-          <ac:picMkLst>
-            <pc:docMk/>
-            <pc:sldMk cId="0" sldId="278"/>
-            <ac:picMk id="63" creationId="{00000000-0000-0000-0000-000000000000}"/>
-          </ac:picMkLst>
-        </pc:picChg>
-        <pc:picChg chg="add del mod">
-          <ac:chgData name="Clever, Aubin" userId="13ca3d7b-db6b-4256-944a-b4e7cf688f90" providerId="ADAL" clId="{EB37EC22-7094-40D1-995C-570CBAC1C1EB}" dt="2026-05-18T13:16:42.129" v="198" actId="478"/>
-          <ac:picMkLst>
-            <pc:docMk/>
-            <pc:sldMk cId="0" sldId="278"/>
-            <ac:picMk id="83" creationId="{D736E0BF-BAE1-81A1-CDD4-4B907D0797FB}"/>
-          </ac:picMkLst>
-        </pc:picChg>
-        <pc:picChg chg="add mod">
-          <ac:chgData name="Clever, Aubin" userId="13ca3d7b-db6b-4256-944a-b4e7cf688f90" providerId="ADAL" clId="{EB37EC22-7094-40D1-995C-570CBAC1C1EB}" dt="2026-05-18T13:14:58.421" v="172"/>
-          <ac:picMkLst>
-            <pc:docMk/>
-            <pc:sldMk cId="0" sldId="278"/>
-            <ac:picMk id="85" creationId="{D319D7EC-A980-F5E8-C807-4BBA9BA3560D}"/>
-          </ac:picMkLst>
-        </pc:picChg>
         <pc:picChg chg="add mod">
           <ac:chgData name="Clever, Aubin" userId="13ca3d7b-db6b-4256-944a-b4e7cf688f90" providerId="ADAL" clId="{EB37EC22-7094-40D1-995C-570CBAC1C1EB}" dt="2026-05-18T13:17:10.667" v="208" actId="1076"/>
           <ac:picMkLst>
             <pc:docMk/>
             <pc:sldMk cId="0" sldId="278"/>
             <ac:picMk id="86" creationId="{531063D4-E04E-9731-AEA0-19C38E07D3B6}"/>
-          </ac:picMkLst>
-        </pc:picChg>
-        <pc:picChg chg="add del mod">
-          <ac:chgData name="Clever, Aubin" userId="13ca3d7b-db6b-4256-944a-b4e7cf688f90" providerId="ADAL" clId="{EB37EC22-7094-40D1-995C-570CBAC1C1EB}" dt="2026-05-18T16:09:48.639" v="906" actId="478"/>
-          <ac:picMkLst>
-            <pc:docMk/>
-            <pc:sldMk cId="0" sldId="278"/>
-            <ac:picMk id="102" creationId="{01CEA45E-20B3-F2E0-6A6A-D134F3A3692E}"/>
-          </ac:picMkLst>
-        </pc:picChg>
-        <pc:picChg chg="add mod">
-          <ac:chgData name="Clever, Aubin" userId="13ca3d7b-db6b-4256-944a-b4e7cf688f90" providerId="ADAL" clId="{EB37EC22-7094-40D1-995C-570CBAC1C1EB}" dt="2026-05-18T16:08:10.228" v="880" actId="931"/>
-          <ac:picMkLst>
-            <pc:docMk/>
-            <pc:sldMk cId="0" sldId="278"/>
-            <ac:picMk id="104" creationId="{68217C1D-059F-10CC-3596-54CD0A242EAD}"/>
-          </ac:picMkLst>
-        </pc:picChg>
-        <pc:picChg chg="add del mod">
-          <ac:chgData name="Clever, Aubin" userId="13ca3d7b-db6b-4256-944a-b4e7cf688f90" providerId="ADAL" clId="{EB37EC22-7094-40D1-995C-570CBAC1C1EB}" dt="2026-05-18T16:13:02.566" v="934" actId="478"/>
-          <ac:picMkLst>
-            <pc:docMk/>
-            <pc:sldMk cId="0" sldId="278"/>
-            <ac:picMk id="106" creationId="{7BCCE41E-42FC-7B87-4757-0F1000371E29}"/>
           </ac:picMkLst>
         </pc:picChg>
         <pc:picChg chg="add mod">
@@ -839,13 +488,6 @@
             <ac:spMk id="19" creationId="{00000000-0000-0000-0000-000000000000}"/>
           </ac:spMkLst>
         </pc:spChg>
-      </pc:sldChg>
-      <pc:sldChg chg="add del">
-        <pc:chgData name="Clever, Aubin" userId="13ca3d7b-db6b-4256-944a-b4e7cf688f90" providerId="ADAL" clId="{EB37EC22-7094-40D1-995C-570CBAC1C1EB}" dt="2026-05-18T14:20:46.323" v="387" actId="2696"/>
-        <pc:sldMkLst>
-          <pc:docMk/>
-          <pc:sldMk cId="0" sldId="280"/>
-        </pc:sldMkLst>
       </pc:sldChg>
       <pc:sldChg chg="modSp add mod">
         <pc:chgData name="Clever, Aubin" userId="13ca3d7b-db6b-4256-944a-b4e7cf688f90" providerId="ADAL" clId="{EB37EC22-7094-40D1-995C-570CBAC1C1EB}" dt="2026-05-18T14:54:56.248" v="720" actId="1076"/>
@@ -1013,37 +655,6 @@
           </ac:spMkLst>
         </pc:spChg>
       </pc:sldChg>
-      <pc:sldChg chg="addSp delSp modSp new del mod">
-        <pc:chgData name="Clever, Aubin" userId="13ca3d7b-db6b-4256-944a-b4e7cf688f90" providerId="ADAL" clId="{EB37EC22-7094-40D1-995C-570CBAC1C1EB}" dt="2026-05-18T15:02:37.200" v="804" actId="2696"/>
-        <pc:sldMkLst>
-          <pc:docMk/>
-          <pc:sldMk cId="2711101191" sldId="283"/>
-        </pc:sldMkLst>
-        <pc:spChg chg="add del">
-          <ac:chgData name="Clever, Aubin" userId="13ca3d7b-db6b-4256-944a-b4e7cf688f90" providerId="ADAL" clId="{EB37EC22-7094-40D1-995C-570CBAC1C1EB}" dt="2026-05-18T14:57:27.473" v="724" actId="22"/>
-          <ac:spMkLst>
-            <pc:docMk/>
-            <pc:sldMk cId="2711101191" sldId="283"/>
-            <ac:spMk id="3" creationId="{FD7BAFD6-AABC-E16F-372B-9C7463000F7C}"/>
-          </ac:spMkLst>
-        </pc:spChg>
-        <pc:picChg chg="add del mod">
-          <ac:chgData name="Clever, Aubin" userId="13ca3d7b-db6b-4256-944a-b4e7cf688f90" providerId="ADAL" clId="{EB37EC22-7094-40D1-995C-570CBAC1C1EB}" dt="2026-05-18T14:59:07.377" v="727" actId="478"/>
-          <ac:picMkLst>
-            <pc:docMk/>
-            <pc:sldMk cId="2711101191" sldId="283"/>
-            <ac:picMk id="5" creationId="{087B4AFF-06E5-2FFD-50CE-F757F3077E9E}"/>
-          </ac:picMkLst>
-        </pc:picChg>
-        <pc:picChg chg="add">
-          <ac:chgData name="Clever, Aubin" userId="13ca3d7b-db6b-4256-944a-b4e7cf688f90" providerId="ADAL" clId="{EB37EC22-7094-40D1-995C-570CBAC1C1EB}" dt="2026-05-18T14:59:08.284" v="728" actId="22"/>
-          <ac:picMkLst>
-            <pc:docMk/>
-            <pc:sldMk cId="2711101191" sldId="283"/>
-            <ac:picMk id="7" creationId="{008476F7-F48B-9387-A41E-ADFCBD173C3C}"/>
-          </ac:picMkLst>
-        </pc:picChg>
-      </pc:sldChg>
       <pc:sldChg chg="add ord">
         <pc:chgData name="Clever, Aubin" userId="13ca3d7b-db6b-4256-944a-b4e7cf688f90" providerId="ADAL" clId="{EB37EC22-7094-40D1-995C-570CBAC1C1EB}" dt="2026-05-18T15:19:36.793" v="828"/>
         <pc:sldMkLst>
@@ -2914,7 +2525,7 @@
           <a:p>
             <a:fld id="{4B12D38B-AFCA-4EB4-B8F6-B1D999B5B3C0}" type="datetimeFigureOut">
               <a:rPr lang="en-US" smtClean="0"/>
-              <a:t>5/20/2026</a:t>
+              <a:t>5/23/2026</a:t>
             </a:fld>
             <a:endParaRPr lang="en-US"/>
           </a:p>
@@ -3112,7 +2723,7 @@
           <a:p>
             <a:fld id="{4B12D38B-AFCA-4EB4-B8F6-B1D999B5B3C0}" type="datetimeFigureOut">
               <a:rPr lang="en-US" smtClean="0"/>
-              <a:t>5/20/2026</a:t>
+              <a:t>5/23/2026</a:t>
             </a:fld>
             <a:endParaRPr lang="en-US"/>
           </a:p>
@@ -3320,7 +2931,7 @@
           <a:p>
             <a:fld id="{4B12D38B-AFCA-4EB4-B8F6-B1D999B5B3C0}" type="datetimeFigureOut">
               <a:rPr lang="en-US" smtClean="0"/>
-              <a:t>5/20/2026</a:t>
+              <a:t>5/23/2026</a:t>
             </a:fld>
             <a:endParaRPr lang="en-US"/>
           </a:p>
@@ -3575,7 +3186,7 @@
           <a:p>
             <a:fld id="{4B12D38B-AFCA-4EB4-B8F6-B1D999B5B3C0}" type="datetimeFigureOut">
               <a:rPr lang="en-US" smtClean="0"/>
-              <a:t>5/20/2026</a:t>
+              <a:t>5/23/2026</a:t>
             </a:fld>
             <a:endParaRPr lang="en-US"/>
           </a:p>
@@ -3773,7 +3384,7 @@
           <a:p>
             <a:fld id="{4B12D38B-AFCA-4EB4-B8F6-B1D999B5B3C0}" type="datetimeFigureOut">
               <a:rPr lang="en-US" smtClean="0"/>
-              <a:t>5/20/2026</a:t>
+              <a:t>5/23/2026</a:t>
             </a:fld>
             <a:endParaRPr lang="en-US"/>
           </a:p>
@@ -4048,7 +3659,7 @@
           <a:p>
             <a:fld id="{4B12D38B-AFCA-4EB4-B8F6-B1D999B5B3C0}" type="datetimeFigureOut">
               <a:rPr lang="en-US" smtClean="0"/>
-              <a:t>5/20/2026</a:t>
+              <a:t>5/23/2026</a:t>
             </a:fld>
             <a:endParaRPr lang="en-US"/>
           </a:p>
@@ -4313,7 +3924,7 @@
           <a:p>
             <a:fld id="{4B12D38B-AFCA-4EB4-B8F6-B1D999B5B3C0}" type="datetimeFigureOut">
               <a:rPr lang="en-US" smtClean="0"/>
-              <a:t>5/20/2026</a:t>
+              <a:t>5/23/2026</a:t>
             </a:fld>
             <a:endParaRPr lang="en-US"/>
           </a:p>
@@ -4725,7 +4336,7 @@
           <a:p>
             <a:fld id="{4B12D38B-AFCA-4EB4-B8F6-B1D999B5B3C0}" type="datetimeFigureOut">
               <a:rPr lang="en-US" smtClean="0"/>
-              <a:t>5/20/2026</a:t>
+              <a:t>5/23/2026</a:t>
             </a:fld>
             <a:endParaRPr lang="en-US"/>
           </a:p>
@@ -4866,7 +4477,7 @@
           <a:p>
             <a:fld id="{4B12D38B-AFCA-4EB4-B8F6-B1D999B5B3C0}" type="datetimeFigureOut">
               <a:rPr lang="en-US" smtClean="0"/>
-              <a:t>5/20/2026</a:t>
+              <a:t>5/23/2026</a:t>
             </a:fld>
             <a:endParaRPr lang="en-US"/>
           </a:p>
@@ -4979,7 +4590,7 @@
           <a:p>
             <a:fld id="{4B12D38B-AFCA-4EB4-B8F6-B1D999B5B3C0}" type="datetimeFigureOut">
               <a:rPr lang="en-US" smtClean="0"/>
-              <a:t>5/20/2026</a:t>
+              <a:t>5/23/2026</a:t>
             </a:fld>
             <a:endParaRPr lang="en-US"/>
           </a:p>
@@ -5290,7 +4901,7 @@
           <a:p>
             <a:fld id="{4B12D38B-AFCA-4EB4-B8F6-B1D999B5B3C0}" type="datetimeFigureOut">
               <a:rPr lang="en-US" smtClean="0"/>
-              <a:t>5/20/2026</a:t>
+              <a:t>5/23/2026</a:t>
             </a:fld>
             <a:endParaRPr lang="en-US"/>
           </a:p>
@@ -5813,7 +5424,7 @@
           <a:p>
             <a:fld id="{4B12D38B-AFCA-4EB4-B8F6-B1D999B5B3C0}" type="datetimeFigureOut">
               <a:rPr lang="en-US" smtClean="0"/>
-              <a:t>5/20/2026</a:t>
+              <a:t>5/23/2026</a:t>
             </a:fld>
             <a:endParaRPr lang="en-US"/>
           </a:p>
@@ -7019,6 +6630,53 @@
           </a:p>
         </p:txBody>
       </p:sp>
+      <p:pic>
+        <p:nvPicPr>
+          <p:cNvPr id="1026" name="Picture 2">
+            <a:extLst>
+              <a:ext uri="{FF2B5EF4-FFF2-40B4-BE49-F238E27FC236}">
+                <a16:creationId xmlns:a16="http://schemas.microsoft.com/office/drawing/2014/main" id="{F1BE82D6-F6AC-1DFF-EC36-23EE5C75B2E7}"/>
+              </a:ext>
+            </a:extLst>
+          </p:cNvPr>
+          <p:cNvPicPr>
+            <a:picLocks noChangeAspect="1" noChangeArrowheads="1"/>
+          </p:cNvPicPr>
+          <p:nvPr/>
+        </p:nvPicPr>
+        <p:blipFill>
+          <a:blip r:embed="rId6">
+            <a:extLst>
+              <a:ext uri="{28A0092B-C50C-407E-A947-70E740481C1C}">
+                <a14:useLocalDpi xmlns:a14="http://schemas.microsoft.com/office/drawing/2010/main" val="0"/>
+              </a:ext>
+            </a:extLst>
+          </a:blip>
+          <a:srcRect/>
+          <a:stretch>
+            <a:fillRect/>
+          </a:stretch>
+        </p:blipFill>
+        <p:spPr bwMode="auto">
+          <a:xfrm>
+            <a:off x="7278624" y="274320"/>
+            <a:ext cx="1371600" cy="1371600"/>
+          </a:xfrm>
+          <a:prstGeom prst="rect">
+            <a:avLst/>
+          </a:prstGeom>
+          <a:noFill/>
+          <a:extLst>
+            <a:ext uri="{909E8E84-426E-40DD-AFC4-6F175D3DCCD1}">
+              <a14:hiddenFill xmlns:a14="http://schemas.microsoft.com/office/drawing/2010/main">
+                <a:solidFill>
+                  <a:srgbClr val="FFFFFF"/>
+                </a:solidFill>
+              </a14:hiddenFill>
+            </a:ext>
+          </a:extLst>
+        </p:spPr>
+      </p:pic>
     </p:spTree>
   </p:cSld>
   <p:clrMapOvr>
